--- a/01R/05_patchwork_intro.pptx
+++ b/01R/05_patchwork_intro.pptx
@@ -264,7 +264,7 @@
           <a:p>
             <a:fld id="{9F946EB4-3198-594C-A2FB-14B5E60A7C36}" type="datetimeFigureOut">
               <a:rPr lang="fr-FR" smtClean="0"/>
-              <a:t>31/05/2025</a:t>
+              <a:t>01/06/2025</a:t>
             </a:fld>
             <a:endParaRPr lang="fr-FR"/>
           </a:p>
@@ -462,7 +462,7 @@
           <a:p>
             <a:fld id="{9F946EB4-3198-594C-A2FB-14B5E60A7C36}" type="datetimeFigureOut">
               <a:rPr lang="fr-FR" smtClean="0"/>
-              <a:t>31/05/2025</a:t>
+              <a:t>01/06/2025</a:t>
             </a:fld>
             <a:endParaRPr lang="fr-FR"/>
           </a:p>
@@ -670,7 +670,7 @@
           <a:p>
             <a:fld id="{9F946EB4-3198-594C-A2FB-14B5E60A7C36}" type="datetimeFigureOut">
               <a:rPr lang="fr-FR" smtClean="0"/>
-              <a:t>31/05/2025</a:t>
+              <a:t>01/06/2025</a:t>
             </a:fld>
             <a:endParaRPr lang="fr-FR"/>
           </a:p>
@@ -868,7 +868,7 @@
           <a:p>
             <a:fld id="{9F946EB4-3198-594C-A2FB-14B5E60A7C36}" type="datetimeFigureOut">
               <a:rPr lang="fr-FR" smtClean="0"/>
-              <a:t>31/05/2025</a:t>
+              <a:t>01/06/2025</a:t>
             </a:fld>
             <a:endParaRPr lang="fr-FR"/>
           </a:p>
@@ -1143,7 +1143,7 @@
           <a:p>
             <a:fld id="{9F946EB4-3198-594C-A2FB-14B5E60A7C36}" type="datetimeFigureOut">
               <a:rPr lang="fr-FR" smtClean="0"/>
-              <a:t>31/05/2025</a:t>
+              <a:t>01/06/2025</a:t>
             </a:fld>
             <a:endParaRPr lang="fr-FR"/>
           </a:p>
@@ -1408,7 +1408,7 @@
           <a:p>
             <a:fld id="{9F946EB4-3198-594C-A2FB-14B5E60A7C36}" type="datetimeFigureOut">
               <a:rPr lang="fr-FR" smtClean="0"/>
-              <a:t>31/05/2025</a:t>
+              <a:t>01/06/2025</a:t>
             </a:fld>
             <a:endParaRPr lang="fr-FR"/>
           </a:p>
@@ -1820,7 +1820,7 @@
           <a:p>
             <a:fld id="{9F946EB4-3198-594C-A2FB-14B5E60A7C36}" type="datetimeFigureOut">
               <a:rPr lang="fr-FR" smtClean="0"/>
-              <a:t>31/05/2025</a:t>
+              <a:t>01/06/2025</a:t>
             </a:fld>
             <a:endParaRPr lang="fr-FR"/>
           </a:p>
@@ -1961,7 +1961,7 @@
           <a:p>
             <a:fld id="{9F946EB4-3198-594C-A2FB-14B5E60A7C36}" type="datetimeFigureOut">
               <a:rPr lang="fr-FR" smtClean="0"/>
-              <a:t>31/05/2025</a:t>
+              <a:t>01/06/2025</a:t>
             </a:fld>
             <a:endParaRPr lang="fr-FR"/>
           </a:p>
@@ -2074,7 +2074,7 @@
           <a:p>
             <a:fld id="{9F946EB4-3198-594C-A2FB-14B5E60A7C36}" type="datetimeFigureOut">
               <a:rPr lang="fr-FR" smtClean="0"/>
-              <a:t>31/05/2025</a:t>
+              <a:t>01/06/2025</a:t>
             </a:fld>
             <a:endParaRPr lang="fr-FR"/>
           </a:p>
@@ -2385,7 +2385,7 @@
           <a:p>
             <a:fld id="{9F946EB4-3198-594C-A2FB-14B5E60A7C36}" type="datetimeFigureOut">
               <a:rPr lang="fr-FR" smtClean="0"/>
-              <a:t>31/05/2025</a:t>
+              <a:t>01/06/2025</a:t>
             </a:fld>
             <a:endParaRPr lang="fr-FR"/>
           </a:p>
@@ -2673,7 +2673,7 @@
           <a:p>
             <a:fld id="{9F946EB4-3198-594C-A2FB-14B5E60A7C36}" type="datetimeFigureOut">
               <a:rPr lang="fr-FR" smtClean="0"/>
-              <a:t>31/05/2025</a:t>
+              <a:t>01/06/2025</a:t>
             </a:fld>
             <a:endParaRPr lang="fr-FR"/>
           </a:p>
@@ -2914,7 +2914,7 @@
           <a:p>
             <a:fld id="{9F946EB4-3198-594C-A2FB-14B5E60A7C36}" type="datetimeFigureOut">
               <a:rPr lang="fr-FR" smtClean="0"/>
-              <a:t>31/05/2025</a:t>
+              <a:t>01/06/2025</a:t>
             </a:fld>
             <a:endParaRPr lang="fr-FR"/>
           </a:p>
@@ -3801,7 +3801,7 @@
           <a:lstStyle/>
           <a:p>
             <a:r>
-              <a:rPr dirty="0">
+              <a:rPr b="1" dirty="0">
                 <a:solidFill>
                   <a:srgbClr val="003B4F"/>
                 </a:solidFill>
@@ -3810,7 +3810,7 @@
               <a:t>il1a &lt;- covid </a:t>
             </a:r>
             <a:r>
-              <a:rPr dirty="0">
+              <a:rPr b="1" dirty="0">
                 <a:solidFill>
                   <a:srgbClr val="5E5E5E"/>
                 </a:solidFill>
@@ -3819,10 +3819,10 @@
               <a:t>|&gt;</a:t>
             </a:r>
             <a:br>
-              <a:rPr dirty="0"/>
+              <a:rPr b="1" dirty="0"/>
             </a:br>
             <a:r>
-              <a:rPr dirty="0">
+              <a:rPr b="1" dirty="0">
                 <a:solidFill>
                   <a:srgbClr val="003B4F"/>
                 </a:solidFill>
@@ -3831,7 +3831,7 @@
               <a:t>  </a:t>
             </a:r>
             <a:r>
-              <a:rPr dirty="0">
+              <a:rPr b="1" dirty="0">
                 <a:solidFill>
                   <a:srgbClr val="4758AB"/>
                 </a:solidFill>
@@ -3840,7 +3840,7 @@
               <a:t>filter</a:t>
             </a:r>
             <a:r>
-              <a:rPr dirty="0">
+              <a:rPr b="1" dirty="0">
                 <a:solidFill>
                   <a:srgbClr val="003B4F"/>
                 </a:solidFill>
@@ -3849,7 +3849,7 @@
               <a:t>(status </a:t>
             </a:r>
             <a:r>
-              <a:rPr dirty="0">
+              <a:rPr b="1" dirty="0">
                 <a:solidFill>
                   <a:srgbClr val="5E5E5E"/>
                 </a:solidFill>
@@ -3858,7 +3858,7 @@
               <a:t>==</a:t>
             </a:r>
             <a:r>
-              <a:rPr dirty="0">
+              <a:rPr b="1" dirty="0">
                 <a:solidFill>
                   <a:srgbClr val="003B4F"/>
                 </a:solidFill>
@@ -3867,7 +3867,7 @@
               <a:t> </a:t>
             </a:r>
             <a:r>
-              <a:rPr dirty="0">
+              <a:rPr b="1" dirty="0">
                 <a:solidFill>
                   <a:srgbClr val="20794D"/>
                 </a:solidFill>
@@ -3876,7 +3876,7 @@
               <a:t>"</a:t>
             </a:r>
             <a:r>
-              <a:rPr dirty="0" err="1">
+              <a:rPr b="1" dirty="0" err="1">
                 <a:solidFill>
                   <a:srgbClr val="20794D"/>
                 </a:solidFill>
@@ -3885,7 +3885,7 @@
               <a:t>nCOV</a:t>
             </a:r>
             <a:r>
-              <a:rPr dirty="0">
+              <a:rPr b="1" dirty="0">
                 <a:solidFill>
                   <a:srgbClr val="20794D"/>
                 </a:solidFill>
@@ -3894,7 +3894,7 @@
               <a:t>"</a:t>
             </a:r>
             <a:r>
-              <a:rPr dirty="0">
+              <a:rPr b="1" dirty="0">
                 <a:solidFill>
                   <a:srgbClr val="003B4F"/>
                 </a:solidFill>
@@ -3903,7 +3903,7 @@
               <a:t>) </a:t>
             </a:r>
             <a:r>
-              <a:rPr dirty="0">
+              <a:rPr b="1" dirty="0">
                 <a:solidFill>
                   <a:srgbClr val="5E5E5E"/>
                 </a:solidFill>
@@ -3912,10 +3912,10 @@
               <a:t>|&gt;</a:t>
             </a:r>
             <a:br>
-              <a:rPr dirty="0"/>
+              <a:rPr b="1" dirty="0"/>
             </a:br>
             <a:r>
-              <a:rPr dirty="0">
+              <a:rPr b="1" dirty="0">
                 <a:solidFill>
                   <a:srgbClr val="003B4F"/>
                 </a:solidFill>
@@ -3924,7 +3924,7 @@
               <a:t>  </a:t>
             </a:r>
             <a:r>
-              <a:rPr dirty="0" err="1">
+              <a:rPr b="1" dirty="0" err="1">
                 <a:solidFill>
                   <a:srgbClr val="4758AB"/>
                 </a:solidFill>
@@ -3933,7 +3933,7 @@
               <a:t>ggplot</a:t>
             </a:r>
             <a:r>
-              <a:rPr dirty="0">
+              <a:rPr b="1" dirty="0">
                 <a:solidFill>
                   <a:srgbClr val="003B4F"/>
                 </a:solidFill>
@@ -3942,7 +3942,7 @@
               <a:t>(</a:t>
             </a:r>
             <a:r>
-              <a:rPr dirty="0" err="1">
+              <a:rPr b="1" dirty="0" err="1">
                 <a:solidFill>
                   <a:srgbClr val="4758AB"/>
                 </a:solidFill>
@@ -3951,7 +3951,7 @@
               <a:t>aes</a:t>
             </a:r>
             <a:r>
-              <a:rPr dirty="0">
+              <a:rPr b="1" dirty="0">
                 <a:solidFill>
                   <a:srgbClr val="003B4F"/>
                 </a:solidFill>
@@ -3960,7 +3960,7 @@
               <a:t>(</a:t>
             </a:r>
             <a:r>
-              <a:rPr dirty="0">
+              <a:rPr b="1" dirty="0">
                 <a:solidFill>
                   <a:srgbClr val="657422"/>
                 </a:solidFill>
@@ -3969,7 +3969,7 @@
               <a:t>x =</a:t>
             </a:r>
             <a:r>
-              <a:rPr dirty="0">
+              <a:rPr b="1" dirty="0">
                 <a:solidFill>
                   <a:srgbClr val="003B4F"/>
                 </a:solidFill>
@@ -3978,7 +3978,7 @@
               <a:t> time, </a:t>
             </a:r>
             <a:r>
-              <a:rPr dirty="0">
+              <a:rPr b="1" dirty="0">
                 <a:solidFill>
                   <a:srgbClr val="657422"/>
                 </a:solidFill>
@@ -3987,7 +3987,7 @@
               <a:t>y =</a:t>
             </a:r>
             <a:r>
-              <a:rPr dirty="0">
+              <a:rPr b="1" dirty="0">
                 <a:solidFill>
                   <a:srgbClr val="003B4F"/>
                 </a:solidFill>
@@ -3996,7 +3996,7 @@
               <a:t> IL1A, </a:t>
             </a:r>
             <a:r>
-              <a:rPr dirty="0">
+              <a:rPr b="1" dirty="0">
                 <a:solidFill>
                   <a:srgbClr val="657422"/>
                 </a:solidFill>
@@ -4005,7 +4005,7 @@
               <a:t>color =</a:t>
             </a:r>
             <a:r>
-              <a:rPr dirty="0">
+              <a:rPr b="1" dirty="0">
                 <a:solidFill>
                   <a:srgbClr val="003B4F"/>
                 </a:solidFill>
@@ -4014,7 +4014,7 @@
               <a:t> id)) </a:t>
             </a:r>
             <a:r>
-              <a:rPr dirty="0">
+              <a:rPr b="1" dirty="0">
                 <a:solidFill>
                   <a:srgbClr val="5E5E5E"/>
                 </a:solidFill>
@@ -4023,7 +4023,7 @@
               <a:t>+</a:t>
             </a:r>
             <a:r>
-              <a:rPr dirty="0">
+              <a:rPr b="1" dirty="0">
                 <a:solidFill>
                   <a:srgbClr val="003B4F"/>
                 </a:solidFill>
@@ -4032,10 +4032,10 @@
               <a:t> </a:t>
             </a:r>
             <a:br>
-              <a:rPr dirty="0"/>
+              <a:rPr b="1" dirty="0"/>
             </a:br>
             <a:r>
-              <a:rPr dirty="0">
+              <a:rPr b="1" dirty="0">
                 <a:solidFill>
                   <a:srgbClr val="003B4F"/>
                 </a:solidFill>
@@ -4044,7 +4044,7 @@
               <a:t>  </a:t>
             </a:r>
             <a:r>
-              <a:rPr dirty="0" err="1">
+              <a:rPr b="1" dirty="0" err="1">
                 <a:solidFill>
                   <a:srgbClr val="4758AB"/>
                 </a:solidFill>
@@ -4053,7 +4053,7 @@
               <a:t>geom_point</a:t>
             </a:r>
             <a:r>
-              <a:rPr dirty="0">
+              <a:rPr b="1" dirty="0">
                 <a:solidFill>
                   <a:srgbClr val="003B4F"/>
                 </a:solidFill>
@@ -4062,7 +4062,7 @@
               <a:t>() </a:t>
             </a:r>
             <a:r>
-              <a:rPr dirty="0">
+              <a:rPr b="1" dirty="0">
                 <a:solidFill>
                   <a:srgbClr val="5E5E5E"/>
                 </a:solidFill>
@@ -4071,7 +4071,7 @@
               <a:t>+</a:t>
             </a:r>
             <a:r>
-              <a:rPr dirty="0">
+              <a:rPr b="1" dirty="0">
                 <a:solidFill>
                   <a:srgbClr val="003B4F"/>
                 </a:solidFill>
@@ -4080,10 +4080,10 @@
               <a:t> </a:t>
             </a:r>
             <a:br>
-              <a:rPr dirty="0"/>
+              <a:rPr b="1" dirty="0"/>
             </a:br>
             <a:r>
-              <a:rPr dirty="0">
+              <a:rPr b="1" dirty="0">
                 <a:solidFill>
                   <a:srgbClr val="003B4F"/>
                 </a:solidFill>
@@ -4092,7 +4092,7 @@
               <a:t>  </a:t>
             </a:r>
             <a:r>
-              <a:rPr dirty="0" err="1">
+              <a:rPr b="1" dirty="0" err="1">
                 <a:solidFill>
                   <a:srgbClr val="4758AB"/>
                 </a:solidFill>
@@ -4101,7 +4101,7 @@
               <a:t>geom_line</a:t>
             </a:r>
             <a:r>
-              <a:rPr dirty="0">
+              <a:rPr b="1" dirty="0">
                 <a:solidFill>
                   <a:srgbClr val="003B4F"/>
                 </a:solidFill>
@@ -4110,16 +4110,16 @@
               <a:t>()</a:t>
             </a:r>
             <a:br>
-              <a:rPr dirty="0"/>
+              <a:rPr b="1" dirty="0"/>
             </a:br>
             <a:br>
-              <a:rPr dirty="0"/>
+              <a:rPr b="1" dirty="0"/>
             </a:br>
             <a:br>
-              <a:rPr dirty="0"/>
+              <a:rPr b="1" dirty="0"/>
             </a:br>
             <a:r>
-              <a:rPr dirty="0">
+              <a:rPr b="1" dirty="0">
                 <a:solidFill>
                   <a:srgbClr val="003B4F"/>
                 </a:solidFill>
@@ -4128,7 +4128,7 @@
               <a:t>il1b &lt;- covid </a:t>
             </a:r>
             <a:r>
-              <a:rPr dirty="0">
+              <a:rPr b="1" dirty="0">
                 <a:solidFill>
                   <a:srgbClr val="5E5E5E"/>
                 </a:solidFill>
@@ -4137,10 +4137,10 @@
               <a:t>|&gt;</a:t>
             </a:r>
             <a:br>
-              <a:rPr dirty="0"/>
+              <a:rPr b="1" dirty="0"/>
             </a:br>
             <a:r>
-              <a:rPr dirty="0">
+              <a:rPr b="1" dirty="0">
                 <a:solidFill>
                   <a:srgbClr val="003B4F"/>
                 </a:solidFill>
@@ -4149,7 +4149,7 @@
               <a:t>  </a:t>
             </a:r>
             <a:r>
-              <a:rPr dirty="0">
+              <a:rPr b="1" dirty="0">
                 <a:solidFill>
                   <a:srgbClr val="4758AB"/>
                 </a:solidFill>
@@ -4158,7 +4158,7 @@
               <a:t>filter</a:t>
             </a:r>
             <a:r>
-              <a:rPr dirty="0">
+              <a:rPr b="1" dirty="0">
                 <a:solidFill>
                   <a:srgbClr val="003B4F"/>
                 </a:solidFill>
@@ -4167,7 +4167,7 @@
               <a:t>(status </a:t>
             </a:r>
             <a:r>
-              <a:rPr dirty="0">
+              <a:rPr b="1" dirty="0">
                 <a:solidFill>
                   <a:srgbClr val="5E5E5E"/>
                 </a:solidFill>
@@ -4176,7 +4176,7 @@
               <a:t>==</a:t>
             </a:r>
             <a:r>
-              <a:rPr dirty="0">
+              <a:rPr b="1" dirty="0">
                 <a:solidFill>
                   <a:srgbClr val="003B4F"/>
                 </a:solidFill>
@@ -4185,7 +4185,7 @@
               <a:t> </a:t>
             </a:r>
             <a:r>
-              <a:rPr dirty="0">
+              <a:rPr b="1" dirty="0">
                 <a:solidFill>
                   <a:srgbClr val="20794D"/>
                 </a:solidFill>
@@ -4194,7 +4194,7 @@
               <a:t>"</a:t>
             </a:r>
             <a:r>
-              <a:rPr dirty="0" err="1">
+              <a:rPr b="1" dirty="0" err="1">
                 <a:solidFill>
                   <a:srgbClr val="20794D"/>
                 </a:solidFill>
@@ -4203,7 +4203,7 @@
               <a:t>nCOV</a:t>
             </a:r>
             <a:r>
-              <a:rPr dirty="0">
+              <a:rPr b="1" dirty="0">
                 <a:solidFill>
                   <a:srgbClr val="20794D"/>
                 </a:solidFill>
@@ -4212,7 +4212,7 @@
               <a:t>"</a:t>
             </a:r>
             <a:r>
-              <a:rPr dirty="0">
+              <a:rPr b="1" dirty="0">
                 <a:solidFill>
                   <a:srgbClr val="003B4F"/>
                 </a:solidFill>
@@ -4221,7 +4221,7 @@
               <a:t>) </a:t>
             </a:r>
             <a:r>
-              <a:rPr dirty="0">
+              <a:rPr b="1" dirty="0">
                 <a:solidFill>
                   <a:srgbClr val="5E5E5E"/>
                 </a:solidFill>
@@ -4230,10 +4230,10 @@
               <a:t>|&gt;</a:t>
             </a:r>
             <a:br>
-              <a:rPr dirty="0"/>
+              <a:rPr b="1" dirty="0"/>
             </a:br>
             <a:r>
-              <a:rPr dirty="0">
+              <a:rPr b="1" dirty="0">
                 <a:solidFill>
                   <a:srgbClr val="003B4F"/>
                 </a:solidFill>
@@ -4242,7 +4242,7 @@
               <a:t>  </a:t>
             </a:r>
             <a:r>
-              <a:rPr dirty="0" err="1">
+              <a:rPr b="1" dirty="0" err="1">
                 <a:solidFill>
                   <a:srgbClr val="4758AB"/>
                 </a:solidFill>
@@ -4251,7 +4251,7 @@
               <a:t>ggplot</a:t>
             </a:r>
             <a:r>
-              <a:rPr dirty="0">
+              <a:rPr b="1" dirty="0">
                 <a:solidFill>
                   <a:srgbClr val="003B4F"/>
                 </a:solidFill>
@@ -4260,7 +4260,7 @@
               <a:t>(</a:t>
             </a:r>
             <a:r>
-              <a:rPr dirty="0" err="1">
+              <a:rPr b="1" dirty="0" err="1">
                 <a:solidFill>
                   <a:srgbClr val="4758AB"/>
                 </a:solidFill>
@@ -4269,7 +4269,7 @@
               <a:t>aes</a:t>
             </a:r>
             <a:r>
-              <a:rPr dirty="0">
+              <a:rPr b="1" dirty="0">
                 <a:solidFill>
                   <a:srgbClr val="003B4F"/>
                 </a:solidFill>
@@ -4278,7 +4278,7 @@
               <a:t>(</a:t>
             </a:r>
             <a:r>
-              <a:rPr dirty="0">
+              <a:rPr b="1" dirty="0">
                 <a:solidFill>
                   <a:srgbClr val="657422"/>
                 </a:solidFill>
@@ -4287,7 +4287,7 @@
               <a:t>x =</a:t>
             </a:r>
             <a:r>
-              <a:rPr dirty="0">
+              <a:rPr b="1" dirty="0">
                 <a:solidFill>
                   <a:srgbClr val="003B4F"/>
                 </a:solidFill>
@@ -4296,7 +4296,7 @@
               <a:t> time, </a:t>
             </a:r>
             <a:r>
-              <a:rPr dirty="0">
+              <a:rPr b="1" dirty="0">
                 <a:solidFill>
                   <a:srgbClr val="657422"/>
                 </a:solidFill>
@@ -4305,7 +4305,7 @@
               <a:t>y =</a:t>
             </a:r>
             <a:r>
-              <a:rPr dirty="0">
+              <a:rPr b="1" dirty="0">
                 <a:solidFill>
                   <a:srgbClr val="003B4F"/>
                 </a:solidFill>
@@ -4314,7 +4314,7 @@
               <a:t> IL1B, </a:t>
             </a:r>
             <a:r>
-              <a:rPr dirty="0">
+              <a:rPr b="1" dirty="0">
                 <a:solidFill>
                   <a:srgbClr val="657422"/>
                 </a:solidFill>
@@ -4323,7 +4323,7 @@
               <a:t>color =</a:t>
             </a:r>
             <a:r>
-              <a:rPr dirty="0">
+              <a:rPr b="1" dirty="0">
                 <a:solidFill>
                   <a:srgbClr val="003B4F"/>
                 </a:solidFill>
@@ -4332,7 +4332,7 @@
               <a:t> id)) </a:t>
             </a:r>
             <a:r>
-              <a:rPr dirty="0">
+              <a:rPr b="1" dirty="0">
                 <a:solidFill>
                   <a:srgbClr val="5E5E5E"/>
                 </a:solidFill>
@@ -4341,7 +4341,7 @@
               <a:t>+</a:t>
             </a:r>
             <a:r>
-              <a:rPr dirty="0">
+              <a:rPr b="1" dirty="0">
                 <a:solidFill>
                   <a:srgbClr val="003B4F"/>
                 </a:solidFill>
@@ -4350,10 +4350,10 @@
               <a:t> </a:t>
             </a:r>
             <a:br>
-              <a:rPr dirty="0"/>
+              <a:rPr b="1" dirty="0"/>
             </a:br>
             <a:r>
-              <a:rPr dirty="0">
+              <a:rPr b="1" dirty="0">
                 <a:solidFill>
                   <a:srgbClr val="003B4F"/>
                 </a:solidFill>
@@ -4362,7 +4362,7 @@
               <a:t>  </a:t>
             </a:r>
             <a:r>
-              <a:rPr dirty="0" err="1">
+              <a:rPr b="1" dirty="0" err="1">
                 <a:solidFill>
                   <a:srgbClr val="4758AB"/>
                 </a:solidFill>
@@ -4371,7 +4371,7 @@
               <a:t>geom_point</a:t>
             </a:r>
             <a:r>
-              <a:rPr dirty="0">
+              <a:rPr b="1" dirty="0">
                 <a:solidFill>
                   <a:srgbClr val="003B4F"/>
                 </a:solidFill>
@@ -4380,7 +4380,7 @@
               <a:t>() </a:t>
             </a:r>
             <a:r>
-              <a:rPr dirty="0">
+              <a:rPr b="1" dirty="0">
                 <a:solidFill>
                   <a:srgbClr val="5E5E5E"/>
                 </a:solidFill>
@@ -4389,7 +4389,7 @@
               <a:t>+</a:t>
             </a:r>
             <a:r>
-              <a:rPr dirty="0">
+              <a:rPr b="1" dirty="0">
                 <a:solidFill>
                   <a:srgbClr val="003B4F"/>
                 </a:solidFill>
@@ -4398,10 +4398,10 @@
               <a:t> </a:t>
             </a:r>
             <a:br>
-              <a:rPr dirty="0"/>
+              <a:rPr b="1" dirty="0"/>
             </a:br>
             <a:r>
-              <a:rPr dirty="0">
+              <a:rPr b="1" dirty="0">
                 <a:solidFill>
                   <a:srgbClr val="003B4F"/>
                 </a:solidFill>
@@ -4410,7 +4410,7 @@
               <a:t>  </a:t>
             </a:r>
             <a:r>
-              <a:rPr dirty="0" err="1">
+              <a:rPr b="1" dirty="0" err="1">
                 <a:solidFill>
                   <a:srgbClr val="4758AB"/>
                 </a:solidFill>
@@ -4419,7 +4419,7 @@
               <a:t>geom_line</a:t>
             </a:r>
             <a:r>
-              <a:rPr dirty="0">
+              <a:rPr b="1" dirty="0">
                 <a:solidFill>
                   <a:srgbClr val="003B4F"/>
                 </a:solidFill>
@@ -4428,13 +4428,13 @@
               <a:t>()</a:t>
             </a:r>
             <a:br>
-              <a:rPr dirty="0"/>
+              <a:rPr b="1" dirty="0"/>
             </a:br>
             <a:br>
-              <a:rPr dirty="0"/>
+              <a:rPr b="1" dirty="0"/>
             </a:br>
             <a:r>
-              <a:rPr dirty="0">
+              <a:rPr b="1" dirty="0">
                 <a:solidFill>
                   <a:srgbClr val="003B4F"/>
                 </a:solidFill>
@@ -4443,7 +4443,7 @@
               <a:t>(il1a </a:t>
             </a:r>
             <a:r>
-              <a:rPr dirty="0">
+              <a:rPr b="1" dirty="0">
                 <a:solidFill>
                   <a:srgbClr val="5E5E5E"/>
                 </a:solidFill>
@@ -4452,7 +4452,7 @@
               <a:t>|</a:t>
             </a:r>
             <a:r>
-              <a:rPr dirty="0">
+              <a:rPr b="1" dirty="0">
                 <a:solidFill>
                   <a:srgbClr val="003B4F"/>
                 </a:solidFill>
@@ -4461,7 +4461,7 @@
               <a:t> il1b ) </a:t>
             </a:r>
             <a:r>
-              <a:rPr dirty="0">
+              <a:rPr b="1" dirty="0">
                 <a:solidFill>
                   <a:srgbClr val="5E5E5E"/>
                 </a:solidFill>
@@ -4470,10 +4470,10 @@
               <a:t>+</a:t>
             </a:r>
             <a:br>
-              <a:rPr dirty="0"/>
+              <a:rPr b="1" dirty="0"/>
             </a:br>
             <a:r>
-              <a:rPr dirty="0">
+              <a:rPr b="1" dirty="0">
                 <a:solidFill>
                   <a:srgbClr val="003B4F"/>
                 </a:solidFill>
@@ -4482,7 +4482,7 @@
               <a:t>  </a:t>
             </a:r>
             <a:r>
-              <a:rPr dirty="0" err="1">
+              <a:rPr b="1" dirty="0" err="1">
                 <a:solidFill>
                   <a:srgbClr val="4758AB"/>
                 </a:solidFill>
@@ -4491,7 +4491,7 @@
               <a:t>plot_layout</a:t>
             </a:r>
             <a:r>
-              <a:rPr dirty="0">
+              <a:rPr b="1" dirty="0">
                 <a:solidFill>
                   <a:srgbClr val="003B4F"/>
                 </a:solidFill>
@@ -4500,7 +4500,7 @@
               <a:t>(</a:t>
             </a:r>
             <a:r>
-              <a:rPr dirty="0">
+              <a:rPr b="1" dirty="0">
                 <a:solidFill>
                   <a:srgbClr val="657422"/>
                 </a:solidFill>
@@ -4509,7 +4509,7 @@
               <a:t>guides =</a:t>
             </a:r>
             <a:r>
-              <a:rPr dirty="0">
+              <a:rPr b="1" dirty="0">
                 <a:solidFill>
                   <a:srgbClr val="003B4F"/>
                 </a:solidFill>
@@ -4518,7 +4518,7 @@
               <a:t> </a:t>
             </a:r>
             <a:r>
-              <a:rPr dirty="0">
+              <a:rPr b="1" dirty="0">
                 <a:solidFill>
                   <a:srgbClr val="20794D"/>
                 </a:solidFill>
@@ -4527,7 +4527,7 @@
               <a:t>"collect"</a:t>
             </a:r>
             <a:r>
-              <a:rPr dirty="0">
+              <a:rPr b="1" dirty="0">
                 <a:solidFill>
                   <a:srgbClr val="003B4F"/>
                 </a:solidFill>
